--- a/saturn/saturn-core-flow.pptx
+++ b/saturn/saturn-core-flow.pptx
@@ -200,7 +200,7 @@
           <a:p>
             <a:fld id="{9D12DC2B-A868-EB48-BC74-89BE29D1DE6E}" type="datetimeFigureOut">
               <a:rPr lang="en-US" smtClean="0"/>
-              <a:t>5/26/24</a:t>
+              <a:t>6/30/24</a:t>
             </a:fld>
             <a:endParaRPr lang="en-US" dirty="0"/>
           </a:p>
@@ -8910,7 +8910,7 @@
         <p:spPr>
           <a:xfrm>
             <a:off x="7717422" y="1553323"/>
-            <a:ext cx="0" cy="2487168"/>
+            <a:ext cx="0" cy="2834640"/>
           </a:xfrm>
           <a:prstGeom prst="line">
             <a:avLst/>
@@ -11713,8 +11713,8 @@
         </p:nvSpPr>
         <p:spPr>
           <a:xfrm>
-            <a:off x="1453070" y="220180"/>
-            <a:ext cx="6313780" cy="461665"/>
+            <a:off x="872301" y="220180"/>
+            <a:ext cx="7407862" cy="461665"/>
           </a:xfrm>
           <a:prstGeom prst="rect">
             <a:avLst/>
@@ -11730,7 +11730,7 @@
             <a:pPr algn="l"/>
             <a:r>
               <a:rPr lang="en-US" sz="2400" dirty="0"/>
-              <a:t>Disruptive Approach – Eliminating Intermediaries</a:t>
+              <a:t>Disruptive Approach – Eliminating Payment Intermediaries</a:t>
             </a:r>
           </a:p>
         </p:txBody>
@@ -11749,7 +11749,7 @@
         </p:nvSpPr>
         <p:spPr>
           <a:xfrm>
-            <a:off x="1083609" y="5443185"/>
+            <a:off x="2331643" y="5443185"/>
             <a:ext cx="4863581" cy="923330"/>
           </a:xfrm>
           <a:prstGeom prst="rect">
@@ -11931,7 +11931,7 @@
         </p:nvSpPr>
         <p:spPr>
           <a:xfrm>
-            <a:off x="3252563" y="3750357"/>
+            <a:off x="3252563" y="3960426"/>
             <a:ext cx="4443984" cy="155448"/>
           </a:xfrm>
           <a:prstGeom prst="leftRightArrow">
@@ -12004,7 +12004,7 @@
         </p:nvSpPr>
         <p:spPr>
           <a:xfrm>
-            <a:off x="4666547" y="3524285"/>
+            <a:off x="4666547" y="3734354"/>
             <a:ext cx="1320918" cy="614034"/>
           </a:xfrm>
           <a:prstGeom prst="cloudCallout">
@@ -12094,7 +12094,7 @@
         </p:nvSpPr>
         <p:spPr>
           <a:xfrm>
-            <a:off x="5897762" y="4125032"/>
+            <a:off x="5897762" y="4199174"/>
             <a:ext cx="778449" cy="544667"/>
           </a:xfrm>
           <a:prstGeom prst="rect">
@@ -12129,6 +12129,66 @@
           <a:p>
             <a:pPr algn="ctr"/>
             <a:endParaRPr lang="en-US"/>
+          </a:p>
+        </p:txBody>
+      </p:sp>
+      <p:sp>
+        <p:nvSpPr>
+          <p:cNvPr id="30" name="Oval 29">
+            <a:extLst>
+              <a:ext uri="{FF2B5EF4-FFF2-40B4-BE49-F238E27FC236}">
+                <a16:creationId xmlns:a16="http://schemas.microsoft.com/office/drawing/2014/main" id="{4C192842-F6CA-E149-FEAE-F146C52DEFB6}"/>
+              </a:ext>
+            </a:extLst>
+          </p:cNvPr>
+          <p:cNvSpPr>
+            <a:spLocks/>
+          </p:cNvSpPr>
+          <p:nvPr/>
+        </p:nvSpPr>
+        <p:spPr>
+          <a:xfrm>
+            <a:off x="3124807" y="3563426"/>
+            <a:ext cx="219456" cy="219456"/>
+          </a:xfrm>
+          <a:prstGeom prst="ellipse">
+            <a:avLst/>
+          </a:prstGeom>
+          <a:solidFill>
+            <a:schemeClr val="bg1"/>
+          </a:solidFill>
+        </p:spPr>
+        <p:style>
+          <a:lnRef idx="2">
+            <a:schemeClr val="accent1">
+              <a:shade val="15000"/>
+            </a:schemeClr>
+          </a:lnRef>
+          <a:fillRef idx="1">
+            <a:schemeClr val="accent1"/>
+          </a:fillRef>
+          <a:effectRef idx="0">
+            <a:schemeClr val="accent1"/>
+          </a:effectRef>
+          <a:fontRef idx="minor">
+            <a:schemeClr val="lt1"/>
+          </a:fontRef>
+        </p:style>
+        <p:txBody>
+          <a:bodyPr wrap="none" lIns="45720" tIns="0" rIns="45720" bIns="0" rtlCol="0" anchor="ctr">
+            <a:spAutoFit/>
+          </a:bodyPr>
+          <a:lstStyle/>
+          <a:p>
+            <a:pPr algn="ctr"/>
+            <a:r>
+              <a:rPr lang="en-US" sz="1400" b="1" dirty="0">
+                <a:solidFill>
+                  <a:srgbClr val="FF0000"/>
+                </a:solidFill>
+              </a:rPr>
+              <a:t>T</a:t>
+            </a:r>
           </a:p>
         </p:txBody>
       </p:sp>
